--- a/CV et lettre de motivation/CV et lettre de motivation.pptx
+++ b/CV et lettre de motivation/CV et lettre de motivation.pptx
@@ -3125,6 +3125,46 @@
           </a:p>
         </p:txBody>
       </p:sp>
+      <p:sp>
+        <p:nvSpPr>
+          <p:cNvPr id="2" name="ZoneTexte 1">
+            <a:extLst>
+              <a:ext uri="{FF2B5EF4-FFF2-40B4-BE49-F238E27FC236}">
+                <a16:creationId xmlns:a16="http://schemas.microsoft.com/office/drawing/2014/main" id="{B2F93C1D-9005-27A0-E84B-58BC14B260BF}"/>
+              </a:ext>
+            </a:extLst>
+          </p:cNvPr>
+          <p:cNvSpPr txBox="1"/>
+          <p:nvPr/>
+        </p:nvSpPr>
+        <p:spPr>
+          <a:xfrm>
+            <a:off x="0" y="4864100"/>
+            <a:ext cx="9144000" cy="230832"/>
+          </a:xfrm>
+          <a:prstGeom prst="rect">
+            <a:avLst/>
+          </a:prstGeom>
+          <a:noFill/>
+        </p:spPr>
+        <p:txBody>
+          <a:bodyPr vert="horz" rtlCol="0">
+            <a:spAutoFit/>
+          </a:bodyPr>
+          <a:lstStyle/>
+          <a:p>
+            <a:pPr algn="ctr"/>
+            <a:r>
+              <a:rPr lang="fr-FR" sz="900">
+                <a:solidFill>
+                  <a:srgbClr val="B4B4B4"/>
+                </a:solidFill>
+              </a:rPr>
+              <a:t>(c) titi_23 - mediateur-numerique.github.io - Reproduction interdite sans autorisation</a:t>
+            </a:r>
+          </a:p>
+        </p:txBody>
+      </p:sp>
     </p:spTree>
   </p:cSld>
   <p:clrMapOvr>
@@ -4293,6 +4333,46 @@
           </a:p>
         </p:txBody>
       </p:sp>
+      <p:sp>
+        <p:nvSpPr>
+          <p:cNvPr id="35" name="ZoneTexte 34">
+            <a:extLst>
+              <a:ext uri="{FF2B5EF4-FFF2-40B4-BE49-F238E27FC236}">
+                <a16:creationId xmlns:a16="http://schemas.microsoft.com/office/drawing/2014/main" id="{4A134D05-03E7-1092-4176-3E81BCD4392B}"/>
+              </a:ext>
+            </a:extLst>
+          </p:cNvPr>
+          <p:cNvSpPr txBox="1"/>
+          <p:nvPr/>
+        </p:nvSpPr>
+        <p:spPr>
+          <a:xfrm>
+            <a:off x="0" y="4864100"/>
+            <a:ext cx="9144000" cy="230832"/>
+          </a:xfrm>
+          <a:prstGeom prst="rect">
+            <a:avLst/>
+          </a:prstGeom>
+          <a:noFill/>
+        </p:spPr>
+        <p:txBody>
+          <a:bodyPr vert="horz" rtlCol="0">
+            <a:spAutoFit/>
+          </a:bodyPr>
+          <a:lstStyle/>
+          <a:p>
+            <a:pPr algn="ctr"/>
+            <a:r>
+              <a:rPr lang="fr-FR" sz="900">
+                <a:solidFill>
+                  <a:srgbClr val="B4B4B4"/>
+                </a:solidFill>
+              </a:rPr>
+              <a:t>(c) titi_23 - mediateur-numerique.github.io - Reproduction interdite sans autorisation</a:t>
+            </a:r>
+          </a:p>
+        </p:txBody>
+      </p:sp>
     </p:spTree>
   </p:cSld>
   <p:clrMapOvr>
@@ -5533,6 +5613,46 @@
           </a:p>
         </p:txBody>
       </p:sp>
+      <p:sp>
+        <p:nvSpPr>
+          <p:cNvPr id="37" name="ZoneTexte 36">
+            <a:extLst>
+              <a:ext uri="{FF2B5EF4-FFF2-40B4-BE49-F238E27FC236}">
+                <a16:creationId xmlns:a16="http://schemas.microsoft.com/office/drawing/2014/main" id="{B2EA2B54-73A5-85DD-89FB-E7C9A31314BA}"/>
+              </a:ext>
+            </a:extLst>
+          </p:cNvPr>
+          <p:cNvSpPr txBox="1"/>
+          <p:nvPr/>
+        </p:nvSpPr>
+        <p:spPr>
+          <a:xfrm>
+            <a:off x="0" y="4864100"/>
+            <a:ext cx="9144000" cy="230832"/>
+          </a:xfrm>
+          <a:prstGeom prst="rect">
+            <a:avLst/>
+          </a:prstGeom>
+          <a:noFill/>
+        </p:spPr>
+        <p:txBody>
+          <a:bodyPr vert="horz" rtlCol="0">
+            <a:spAutoFit/>
+          </a:bodyPr>
+          <a:lstStyle/>
+          <a:p>
+            <a:pPr algn="ctr"/>
+            <a:r>
+              <a:rPr lang="fr-FR" sz="900">
+                <a:solidFill>
+                  <a:srgbClr val="B4B4B4"/>
+                </a:solidFill>
+              </a:rPr>
+              <a:t>(c) titi_23 - mediateur-numerique.github.io - Reproduction interdite sans autorisation</a:t>
+            </a:r>
+          </a:p>
+        </p:txBody>
+      </p:sp>
     </p:spTree>
   </p:cSld>
   <p:clrMapOvr>
@@ -7182,6 +7302,46 @@
           </a:p>
         </p:txBody>
       </p:sp>
+      <p:sp>
+        <p:nvSpPr>
+          <p:cNvPr id="50" name="ZoneTexte 49">
+            <a:extLst>
+              <a:ext uri="{FF2B5EF4-FFF2-40B4-BE49-F238E27FC236}">
+                <a16:creationId xmlns:a16="http://schemas.microsoft.com/office/drawing/2014/main" id="{F2C85B30-B6F6-417A-C264-5B7781EBD083}"/>
+              </a:ext>
+            </a:extLst>
+          </p:cNvPr>
+          <p:cNvSpPr txBox="1"/>
+          <p:nvPr/>
+        </p:nvSpPr>
+        <p:spPr>
+          <a:xfrm>
+            <a:off x="0" y="4864100"/>
+            <a:ext cx="9144000" cy="230832"/>
+          </a:xfrm>
+          <a:prstGeom prst="rect">
+            <a:avLst/>
+          </a:prstGeom>
+          <a:noFill/>
+        </p:spPr>
+        <p:txBody>
+          <a:bodyPr vert="horz" rtlCol="0">
+            <a:spAutoFit/>
+          </a:bodyPr>
+          <a:lstStyle/>
+          <a:p>
+            <a:pPr algn="ctr"/>
+            <a:r>
+              <a:rPr lang="fr-FR" sz="900">
+                <a:solidFill>
+                  <a:srgbClr val="B4B4B4"/>
+                </a:solidFill>
+              </a:rPr>
+              <a:t>(c) titi_23 - mediateur-numerique.github.io - Reproduction interdite sans autorisation</a:t>
+            </a:r>
+          </a:p>
+        </p:txBody>
+      </p:sp>
     </p:spTree>
   </p:cSld>
   <p:clrMapOvr>
@@ -8082,6 +8242,46 @@
           </a:p>
         </p:txBody>
       </p:sp>
+      <p:sp>
+        <p:nvSpPr>
+          <p:cNvPr id="28" name="ZoneTexte 27">
+            <a:extLst>
+              <a:ext uri="{FF2B5EF4-FFF2-40B4-BE49-F238E27FC236}">
+                <a16:creationId xmlns:a16="http://schemas.microsoft.com/office/drawing/2014/main" id="{67CE29A6-DDF3-D251-4C2B-4AB906B73D9A}"/>
+              </a:ext>
+            </a:extLst>
+          </p:cNvPr>
+          <p:cNvSpPr txBox="1"/>
+          <p:nvPr/>
+        </p:nvSpPr>
+        <p:spPr>
+          <a:xfrm>
+            <a:off x="0" y="4864100"/>
+            <a:ext cx="9144000" cy="230832"/>
+          </a:xfrm>
+          <a:prstGeom prst="rect">
+            <a:avLst/>
+          </a:prstGeom>
+          <a:noFill/>
+        </p:spPr>
+        <p:txBody>
+          <a:bodyPr vert="horz" rtlCol="0">
+            <a:spAutoFit/>
+          </a:bodyPr>
+          <a:lstStyle/>
+          <a:p>
+            <a:pPr algn="ctr"/>
+            <a:r>
+              <a:rPr lang="fr-FR" sz="900">
+                <a:solidFill>
+                  <a:srgbClr val="B4B4B4"/>
+                </a:solidFill>
+              </a:rPr>
+              <a:t>(c) titi_23 - mediateur-numerique.github.io - Reproduction interdite sans autorisation</a:t>
+            </a:r>
+          </a:p>
+        </p:txBody>
+      </p:sp>
     </p:spTree>
   </p:cSld>
   <p:clrMapOvr>
@@ -9213,6 +9413,46 @@
           </a:p>
         </p:txBody>
       </p:sp>
+      <p:sp>
+        <p:nvSpPr>
+          <p:cNvPr id="35" name="ZoneTexte 34">
+            <a:extLst>
+              <a:ext uri="{FF2B5EF4-FFF2-40B4-BE49-F238E27FC236}">
+                <a16:creationId xmlns:a16="http://schemas.microsoft.com/office/drawing/2014/main" id="{008499D9-18FC-35F5-9BD1-D048C4C9A100}"/>
+              </a:ext>
+            </a:extLst>
+          </p:cNvPr>
+          <p:cNvSpPr txBox="1"/>
+          <p:nvPr/>
+        </p:nvSpPr>
+        <p:spPr>
+          <a:xfrm>
+            <a:off x="0" y="4864100"/>
+            <a:ext cx="9144000" cy="230832"/>
+          </a:xfrm>
+          <a:prstGeom prst="rect">
+            <a:avLst/>
+          </a:prstGeom>
+          <a:noFill/>
+        </p:spPr>
+        <p:txBody>
+          <a:bodyPr vert="horz" rtlCol="0">
+            <a:spAutoFit/>
+          </a:bodyPr>
+          <a:lstStyle/>
+          <a:p>
+            <a:pPr algn="ctr"/>
+            <a:r>
+              <a:rPr lang="fr-FR" sz="900">
+                <a:solidFill>
+                  <a:srgbClr val="B4B4B4"/>
+                </a:solidFill>
+              </a:rPr>
+              <a:t>(c) titi_23 - mediateur-numerique.github.io - Reproduction interdite sans autorisation</a:t>
+            </a:r>
+          </a:p>
+        </p:txBody>
+      </p:sp>
     </p:spTree>
   </p:cSld>
   <p:clrMapOvr>
@@ -10639,6 +10879,46 @@
           </a:p>
         </p:txBody>
       </p:sp>
+      <p:sp>
+        <p:nvSpPr>
+          <p:cNvPr id="43" name="ZoneTexte 42">
+            <a:extLst>
+              <a:ext uri="{FF2B5EF4-FFF2-40B4-BE49-F238E27FC236}">
+                <a16:creationId xmlns:a16="http://schemas.microsoft.com/office/drawing/2014/main" id="{88EFCE94-C9FF-1953-D067-F9379FFDB3C6}"/>
+              </a:ext>
+            </a:extLst>
+          </p:cNvPr>
+          <p:cNvSpPr txBox="1"/>
+          <p:nvPr/>
+        </p:nvSpPr>
+        <p:spPr>
+          <a:xfrm>
+            <a:off x="0" y="4864100"/>
+            <a:ext cx="9144000" cy="230832"/>
+          </a:xfrm>
+          <a:prstGeom prst="rect">
+            <a:avLst/>
+          </a:prstGeom>
+          <a:noFill/>
+        </p:spPr>
+        <p:txBody>
+          <a:bodyPr vert="horz" rtlCol="0">
+            <a:spAutoFit/>
+          </a:bodyPr>
+          <a:lstStyle/>
+          <a:p>
+            <a:pPr algn="ctr"/>
+            <a:r>
+              <a:rPr lang="fr-FR" sz="900">
+                <a:solidFill>
+                  <a:srgbClr val="B4B4B4"/>
+                </a:solidFill>
+              </a:rPr>
+              <a:t>(c) titi_23 - mediateur-numerique.github.io - Reproduction interdite sans autorisation</a:t>
+            </a:r>
+          </a:p>
+        </p:txBody>
+      </p:sp>
     </p:spTree>
   </p:cSld>
   <p:clrMapOvr>
@@ -12065,6 +12345,46 @@
           </a:p>
         </p:txBody>
       </p:sp>
+      <p:sp>
+        <p:nvSpPr>
+          <p:cNvPr id="43" name="ZoneTexte 42">
+            <a:extLst>
+              <a:ext uri="{FF2B5EF4-FFF2-40B4-BE49-F238E27FC236}">
+                <a16:creationId xmlns:a16="http://schemas.microsoft.com/office/drawing/2014/main" id="{51C6C1D2-DAF8-D6B3-C391-B30430D28F35}"/>
+              </a:ext>
+            </a:extLst>
+          </p:cNvPr>
+          <p:cNvSpPr txBox="1"/>
+          <p:nvPr/>
+        </p:nvSpPr>
+        <p:spPr>
+          <a:xfrm>
+            <a:off x="0" y="4864100"/>
+            <a:ext cx="9144000" cy="230832"/>
+          </a:xfrm>
+          <a:prstGeom prst="rect">
+            <a:avLst/>
+          </a:prstGeom>
+          <a:noFill/>
+        </p:spPr>
+        <p:txBody>
+          <a:bodyPr vert="horz" rtlCol="0">
+            <a:spAutoFit/>
+          </a:bodyPr>
+          <a:lstStyle/>
+          <a:p>
+            <a:pPr algn="ctr"/>
+            <a:r>
+              <a:rPr lang="fr-FR" sz="900">
+                <a:solidFill>
+                  <a:srgbClr val="B4B4B4"/>
+                </a:solidFill>
+              </a:rPr>
+              <a:t>(c) titi_23 - mediateur-numerique.github.io - Reproduction interdite sans autorisation</a:t>
+            </a:r>
+          </a:p>
+        </p:txBody>
+      </p:sp>
     </p:spTree>
   </p:cSld>
   <p:clrMapOvr>
@@ -13371,6 +13691,46 @@
           </a:p>
         </p:txBody>
       </p:sp>
+      <p:sp>
+        <p:nvSpPr>
+          <p:cNvPr id="36" name="ZoneTexte 35">
+            <a:extLst>
+              <a:ext uri="{FF2B5EF4-FFF2-40B4-BE49-F238E27FC236}">
+                <a16:creationId xmlns:a16="http://schemas.microsoft.com/office/drawing/2014/main" id="{BA650023-D764-7062-A9CB-23317343DF92}"/>
+              </a:ext>
+            </a:extLst>
+          </p:cNvPr>
+          <p:cNvSpPr txBox="1"/>
+          <p:nvPr/>
+        </p:nvSpPr>
+        <p:spPr>
+          <a:xfrm>
+            <a:off x="0" y="4864100"/>
+            <a:ext cx="9144000" cy="230832"/>
+          </a:xfrm>
+          <a:prstGeom prst="rect">
+            <a:avLst/>
+          </a:prstGeom>
+          <a:noFill/>
+        </p:spPr>
+        <p:txBody>
+          <a:bodyPr vert="horz" rtlCol="0">
+            <a:spAutoFit/>
+          </a:bodyPr>
+          <a:lstStyle/>
+          <a:p>
+            <a:pPr algn="ctr"/>
+            <a:r>
+              <a:rPr lang="fr-FR" sz="900">
+                <a:solidFill>
+                  <a:srgbClr val="B4B4B4"/>
+                </a:solidFill>
+              </a:rPr>
+              <a:t>(c) titi_23 - mediateur-numerique.github.io - Reproduction interdite sans autorisation</a:t>
+            </a:r>
+          </a:p>
+        </p:txBody>
+      </p:sp>
     </p:spTree>
   </p:cSld>
   <p:clrMapOvr>
@@ -14801,6 +15161,46 @@
           </a:p>
         </p:txBody>
       </p:sp>
+      <p:sp>
+        <p:nvSpPr>
+          <p:cNvPr id="43" name="ZoneTexte 42">
+            <a:extLst>
+              <a:ext uri="{FF2B5EF4-FFF2-40B4-BE49-F238E27FC236}">
+                <a16:creationId xmlns:a16="http://schemas.microsoft.com/office/drawing/2014/main" id="{C478B144-3913-D609-91BE-7E1681329282}"/>
+              </a:ext>
+            </a:extLst>
+          </p:cNvPr>
+          <p:cNvSpPr txBox="1"/>
+          <p:nvPr/>
+        </p:nvSpPr>
+        <p:spPr>
+          <a:xfrm>
+            <a:off x="0" y="4864100"/>
+            <a:ext cx="9144000" cy="230832"/>
+          </a:xfrm>
+          <a:prstGeom prst="rect">
+            <a:avLst/>
+          </a:prstGeom>
+          <a:noFill/>
+        </p:spPr>
+        <p:txBody>
+          <a:bodyPr vert="horz" rtlCol="0">
+            <a:spAutoFit/>
+          </a:bodyPr>
+          <a:lstStyle/>
+          <a:p>
+            <a:pPr algn="ctr"/>
+            <a:r>
+              <a:rPr lang="fr-FR" sz="900">
+                <a:solidFill>
+                  <a:srgbClr val="B4B4B4"/>
+                </a:solidFill>
+              </a:rPr>
+              <a:t>(c) titi_23 - mediateur-numerique.github.io - Reproduction interdite sans autorisation</a:t>
+            </a:r>
+          </a:p>
+        </p:txBody>
+      </p:sp>
     </p:spTree>
   </p:cSld>
   <p:clrMapOvr>
@@ -16589,6 +16989,46 @@
           </a:p>
         </p:txBody>
       </p:sp>
+      <p:sp>
+        <p:nvSpPr>
+          <p:cNvPr id="53" name="ZoneTexte 52">
+            <a:extLst>
+              <a:ext uri="{FF2B5EF4-FFF2-40B4-BE49-F238E27FC236}">
+                <a16:creationId xmlns:a16="http://schemas.microsoft.com/office/drawing/2014/main" id="{4DA0961B-C23C-7812-AAAB-16CB7BF472E5}"/>
+              </a:ext>
+            </a:extLst>
+          </p:cNvPr>
+          <p:cNvSpPr txBox="1"/>
+          <p:nvPr/>
+        </p:nvSpPr>
+        <p:spPr>
+          <a:xfrm>
+            <a:off x="0" y="4864100"/>
+            <a:ext cx="9144000" cy="230832"/>
+          </a:xfrm>
+          <a:prstGeom prst="rect">
+            <a:avLst/>
+          </a:prstGeom>
+          <a:noFill/>
+        </p:spPr>
+        <p:txBody>
+          <a:bodyPr vert="horz" rtlCol="0">
+            <a:spAutoFit/>
+          </a:bodyPr>
+          <a:lstStyle/>
+          <a:p>
+            <a:pPr algn="ctr"/>
+            <a:r>
+              <a:rPr lang="fr-FR" sz="900">
+                <a:solidFill>
+                  <a:srgbClr val="B4B4B4"/>
+                </a:solidFill>
+              </a:rPr>
+              <a:t>(c) titi_23 - mediateur-numerique.github.io - Reproduction interdite sans autorisation</a:t>
+            </a:r>
+          </a:p>
+        </p:txBody>
+      </p:sp>
     </p:spTree>
   </p:cSld>
   <p:clrMapOvr>
@@ -17791,6 +18231,46 @@
           </a:p>
         </p:txBody>
       </p:sp>
+      <p:sp>
+        <p:nvSpPr>
+          <p:cNvPr id="36" name="ZoneTexte 35">
+            <a:extLst>
+              <a:ext uri="{FF2B5EF4-FFF2-40B4-BE49-F238E27FC236}">
+                <a16:creationId xmlns:a16="http://schemas.microsoft.com/office/drawing/2014/main" id="{84A04774-02AD-EF81-D58F-0D445841F77B}"/>
+              </a:ext>
+            </a:extLst>
+          </p:cNvPr>
+          <p:cNvSpPr txBox="1"/>
+          <p:nvPr/>
+        </p:nvSpPr>
+        <p:spPr>
+          <a:xfrm>
+            <a:off x="0" y="4864100"/>
+            <a:ext cx="9144000" cy="230832"/>
+          </a:xfrm>
+          <a:prstGeom prst="rect">
+            <a:avLst/>
+          </a:prstGeom>
+          <a:noFill/>
+        </p:spPr>
+        <p:txBody>
+          <a:bodyPr vert="horz" rtlCol="0">
+            <a:spAutoFit/>
+          </a:bodyPr>
+          <a:lstStyle/>
+          <a:p>
+            <a:pPr algn="ctr"/>
+            <a:r>
+              <a:rPr lang="fr-FR" sz="900">
+                <a:solidFill>
+                  <a:srgbClr val="B4B4B4"/>
+                </a:solidFill>
+              </a:rPr>
+              <a:t>(c) titi_23 - mediateur-numerique.github.io - Reproduction interdite sans autorisation</a:t>
+            </a:r>
+          </a:p>
+        </p:txBody>
+      </p:sp>
     </p:spTree>
   </p:cSld>
   <p:clrMapOvr>
@@ -18934,6 +19414,46 @@
           </a:p>
         </p:txBody>
       </p:sp>
+      <p:sp>
+        <p:nvSpPr>
+          <p:cNvPr id="32" name="ZoneTexte 31">
+            <a:extLst>
+              <a:ext uri="{FF2B5EF4-FFF2-40B4-BE49-F238E27FC236}">
+                <a16:creationId xmlns:a16="http://schemas.microsoft.com/office/drawing/2014/main" id="{992D31DF-6654-4A70-FE71-5589CBC77FA7}"/>
+              </a:ext>
+            </a:extLst>
+          </p:cNvPr>
+          <p:cNvSpPr txBox="1"/>
+          <p:nvPr/>
+        </p:nvSpPr>
+        <p:spPr>
+          <a:xfrm>
+            <a:off x="0" y="4864100"/>
+            <a:ext cx="9144000" cy="230832"/>
+          </a:xfrm>
+          <a:prstGeom prst="rect">
+            <a:avLst/>
+          </a:prstGeom>
+          <a:noFill/>
+        </p:spPr>
+        <p:txBody>
+          <a:bodyPr vert="horz" rtlCol="0">
+            <a:spAutoFit/>
+          </a:bodyPr>
+          <a:lstStyle/>
+          <a:p>
+            <a:pPr algn="ctr"/>
+            <a:r>
+              <a:rPr lang="fr-FR" sz="900">
+                <a:solidFill>
+                  <a:srgbClr val="B4B4B4"/>
+                </a:solidFill>
+              </a:rPr>
+              <a:t>(c) titi_23 - mediateur-numerique.github.io - Reproduction interdite sans autorisation</a:t>
+            </a:r>
+          </a:p>
+        </p:txBody>
+      </p:sp>
     </p:spTree>
   </p:cSld>
   <p:clrMapOvr>
@@ -20216,6 +20736,46 @@
           </a:p>
         </p:txBody>
       </p:sp>
+      <p:sp>
+        <p:nvSpPr>
+          <p:cNvPr id="37" name="ZoneTexte 36">
+            <a:extLst>
+              <a:ext uri="{FF2B5EF4-FFF2-40B4-BE49-F238E27FC236}">
+                <a16:creationId xmlns:a16="http://schemas.microsoft.com/office/drawing/2014/main" id="{57443195-92F6-9BE8-2B14-6C7D0089B16C}"/>
+              </a:ext>
+            </a:extLst>
+          </p:cNvPr>
+          <p:cNvSpPr txBox="1"/>
+          <p:nvPr/>
+        </p:nvSpPr>
+        <p:spPr>
+          <a:xfrm>
+            <a:off x="0" y="4864100"/>
+            <a:ext cx="9144000" cy="230832"/>
+          </a:xfrm>
+          <a:prstGeom prst="rect">
+            <a:avLst/>
+          </a:prstGeom>
+          <a:noFill/>
+        </p:spPr>
+        <p:txBody>
+          <a:bodyPr vert="horz" rtlCol="0">
+            <a:spAutoFit/>
+          </a:bodyPr>
+          <a:lstStyle/>
+          <a:p>
+            <a:pPr algn="ctr"/>
+            <a:r>
+              <a:rPr lang="fr-FR" sz="900">
+                <a:solidFill>
+                  <a:srgbClr val="B4B4B4"/>
+                </a:solidFill>
+              </a:rPr>
+              <a:t>(c) titi_23 - mediateur-numerique.github.io - Reproduction interdite sans autorisation</a:t>
+            </a:r>
+          </a:p>
+        </p:txBody>
+      </p:sp>
     </p:spTree>
   </p:cSld>
   <p:clrMapOvr>
@@ -21354,6 +21914,46 @@
           </a:p>
         </p:txBody>
       </p:sp>
+      <p:sp>
+        <p:nvSpPr>
+          <p:cNvPr id="32" name="ZoneTexte 31">
+            <a:extLst>
+              <a:ext uri="{FF2B5EF4-FFF2-40B4-BE49-F238E27FC236}">
+                <a16:creationId xmlns:a16="http://schemas.microsoft.com/office/drawing/2014/main" id="{D6ACA43D-A9C2-70D0-210E-099E37A6DFE8}"/>
+              </a:ext>
+            </a:extLst>
+          </p:cNvPr>
+          <p:cNvSpPr txBox="1"/>
+          <p:nvPr/>
+        </p:nvSpPr>
+        <p:spPr>
+          <a:xfrm>
+            <a:off x="0" y="4864100"/>
+            <a:ext cx="9144000" cy="230832"/>
+          </a:xfrm>
+          <a:prstGeom prst="rect">
+            <a:avLst/>
+          </a:prstGeom>
+          <a:noFill/>
+        </p:spPr>
+        <p:txBody>
+          <a:bodyPr vert="horz" rtlCol="0">
+            <a:spAutoFit/>
+          </a:bodyPr>
+          <a:lstStyle/>
+          <a:p>
+            <a:pPr algn="ctr"/>
+            <a:r>
+              <a:rPr lang="fr-FR" sz="900">
+                <a:solidFill>
+                  <a:srgbClr val="B4B4B4"/>
+                </a:solidFill>
+              </a:rPr>
+              <a:t>(c) titi_23 - mediateur-numerique.github.io - Reproduction interdite sans autorisation</a:t>
+            </a:r>
+          </a:p>
+        </p:txBody>
+      </p:sp>
     </p:spTree>
   </p:cSld>
   <p:clrMapOvr>
@@ -22798,6 +23398,46 @@
           </a:p>
         </p:txBody>
       </p:sp>
+      <p:sp>
+        <p:nvSpPr>
+          <p:cNvPr id="43" name="ZoneTexte 42">
+            <a:extLst>
+              <a:ext uri="{FF2B5EF4-FFF2-40B4-BE49-F238E27FC236}">
+                <a16:creationId xmlns:a16="http://schemas.microsoft.com/office/drawing/2014/main" id="{3ECBBCC6-717B-2025-498A-416D3F5C56C0}"/>
+              </a:ext>
+            </a:extLst>
+          </p:cNvPr>
+          <p:cNvSpPr txBox="1"/>
+          <p:nvPr/>
+        </p:nvSpPr>
+        <p:spPr>
+          <a:xfrm>
+            <a:off x="0" y="4864100"/>
+            <a:ext cx="9144000" cy="230832"/>
+          </a:xfrm>
+          <a:prstGeom prst="rect">
+            <a:avLst/>
+          </a:prstGeom>
+          <a:noFill/>
+        </p:spPr>
+        <p:txBody>
+          <a:bodyPr vert="horz" rtlCol="0">
+            <a:spAutoFit/>
+          </a:bodyPr>
+          <a:lstStyle/>
+          <a:p>
+            <a:pPr algn="ctr"/>
+            <a:r>
+              <a:rPr lang="fr-FR" sz="900">
+                <a:solidFill>
+                  <a:srgbClr val="B4B4B4"/>
+                </a:solidFill>
+              </a:rPr>
+              <a:t>(c) titi_23 - mediateur-numerique.github.io - Reproduction interdite sans autorisation</a:t>
+            </a:r>
+          </a:p>
+        </p:txBody>
+      </p:sp>
     </p:spTree>
   </p:cSld>
   <p:clrMapOvr>
@@ -23376,6 +24016,46 @@
           </a:p>
         </p:txBody>
       </p:sp>
+      <p:sp>
+        <p:nvSpPr>
+          <p:cNvPr id="6" name="ZoneTexte 5">
+            <a:extLst>
+              <a:ext uri="{FF2B5EF4-FFF2-40B4-BE49-F238E27FC236}">
+                <a16:creationId xmlns:a16="http://schemas.microsoft.com/office/drawing/2014/main" id="{CF020B21-4CB3-0E9F-4AB4-4B00709D1259}"/>
+              </a:ext>
+            </a:extLst>
+          </p:cNvPr>
+          <p:cNvSpPr txBox="1"/>
+          <p:nvPr/>
+        </p:nvSpPr>
+        <p:spPr>
+          <a:xfrm>
+            <a:off x="0" y="4864100"/>
+            <a:ext cx="9144000" cy="230832"/>
+          </a:xfrm>
+          <a:prstGeom prst="rect">
+            <a:avLst/>
+          </a:prstGeom>
+          <a:noFill/>
+        </p:spPr>
+        <p:txBody>
+          <a:bodyPr vert="horz" rtlCol="0">
+            <a:spAutoFit/>
+          </a:bodyPr>
+          <a:lstStyle/>
+          <a:p>
+            <a:pPr algn="ctr"/>
+            <a:r>
+              <a:rPr lang="fr-FR" sz="900">
+                <a:solidFill>
+                  <a:srgbClr val="B4B4B4"/>
+                </a:solidFill>
+              </a:rPr>
+              <a:t>(c) titi_23 - mediateur-numerique.github.io - Reproduction interdite sans autorisation</a:t>
+            </a:r>
+          </a:p>
+        </p:txBody>
+      </p:sp>
     </p:spTree>
   </p:cSld>
   <p:clrMapOvr>
@@ -23954,6 +24634,46 @@
           </a:p>
         </p:txBody>
       </p:sp>
+      <p:sp>
+        <p:nvSpPr>
+          <p:cNvPr id="6" name="ZoneTexte 5">
+            <a:extLst>
+              <a:ext uri="{FF2B5EF4-FFF2-40B4-BE49-F238E27FC236}">
+                <a16:creationId xmlns:a16="http://schemas.microsoft.com/office/drawing/2014/main" id="{0DB44B19-095B-8929-CFA4-FA649616B5A2}"/>
+              </a:ext>
+            </a:extLst>
+          </p:cNvPr>
+          <p:cNvSpPr txBox="1"/>
+          <p:nvPr/>
+        </p:nvSpPr>
+        <p:spPr>
+          <a:xfrm>
+            <a:off x="0" y="4864100"/>
+            <a:ext cx="9144000" cy="230832"/>
+          </a:xfrm>
+          <a:prstGeom prst="rect">
+            <a:avLst/>
+          </a:prstGeom>
+          <a:noFill/>
+        </p:spPr>
+        <p:txBody>
+          <a:bodyPr vert="horz" rtlCol="0">
+            <a:spAutoFit/>
+          </a:bodyPr>
+          <a:lstStyle/>
+          <a:p>
+            <a:pPr algn="ctr"/>
+            <a:r>
+              <a:rPr lang="fr-FR" sz="900">
+                <a:solidFill>
+                  <a:srgbClr val="B4B4B4"/>
+                </a:solidFill>
+              </a:rPr>
+              <a:t>(c) titi_23 - mediateur-numerique.github.io - Reproduction interdite sans autorisation</a:t>
+            </a:r>
+          </a:p>
+        </p:txBody>
+      </p:sp>
     </p:spTree>
   </p:cSld>
   <p:clrMapOvr>
@@ -25016,6 +25736,46 @@
           </a:p>
         </p:txBody>
       </p:sp>
+      <p:sp>
+        <p:nvSpPr>
+          <p:cNvPr id="32" name="ZoneTexte 31">
+            <a:extLst>
+              <a:ext uri="{FF2B5EF4-FFF2-40B4-BE49-F238E27FC236}">
+                <a16:creationId xmlns:a16="http://schemas.microsoft.com/office/drawing/2014/main" id="{ACA8BD8C-2ED1-E977-F8FA-6F75135FBCD1}"/>
+              </a:ext>
+            </a:extLst>
+          </p:cNvPr>
+          <p:cNvSpPr txBox="1"/>
+          <p:nvPr/>
+        </p:nvSpPr>
+        <p:spPr>
+          <a:xfrm>
+            <a:off x="0" y="4864100"/>
+            <a:ext cx="9144000" cy="230832"/>
+          </a:xfrm>
+          <a:prstGeom prst="rect">
+            <a:avLst/>
+          </a:prstGeom>
+          <a:noFill/>
+        </p:spPr>
+        <p:txBody>
+          <a:bodyPr vert="horz" rtlCol="0">
+            <a:spAutoFit/>
+          </a:bodyPr>
+          <a:lstStyle/>
+          <a:p>
+            <a:pPr algn="ctr"/>
+            <a:r>
+              <a:rPr lang="fr-FR" sz="900">
+                <a:solidFill>
+                  <a:srgbClr val="B4B4B4"/>
+                </a:solidFill>
+              </a:rPr>
+              <a:t>(c) titi_23 - mediateur-numerique.github.io - Reproduction interdite sans autorisation</a:t>
+            </a:r>
+          </a:p>
+        </p:txBody>
+      </p:sp>
     </p:spTree>
   </p:cSld>
   <p:clrMapOvr>
@@ -25731,6 +26491,46 @@
           </a:p>
         </p:txBody>
       </p:sp>
+      <p:sp>
+        <p:nvSpPr>
+          <p:cNvPr id="22" name="ZoneTexte 21">
+            <a:extLst>
+              <a:ext uri="{FF2B5EF4-FFF2-40B4-BE49-F238E27FC236}">
+                <a16:creationId xmlns:a16="http://schemas.microsoft.com/office/drawing/2014/main" id="{010EEFE1-21FC-22C2-A0FB-AF5AC3711185}"/>
+              </a:ext>
+            </a:extLst>
+          </p:cNvPr>
+          <p:cNvSpPr txBox="1"/>
+          <p:nvPr/>
+        </p:nvSpPr>
+        <p:spPr>
+          <a:xfrm>
+            <a:off x="0" y="4864100"/>
+            <a:ext cx="9144000" cy="230832"/>
+          </a:xfrm>
+          <a:prstGeom prst="rect">
+            <a:avLst/>
+          </a:prstGeom>
+          <a:noFill/>
+        </p:spPr>
+        <p:txBody>
+          <a:bodyPr vert="horz" rtlCol="0">
+            <a:spAutoFit/>
+          </a:bodyPr>
+          <a:lstStyle/>
+          <a:p>
+            <a:pPr algn="ctr"/>
+            <a:r>
+              <a:rPr lang="fr-FR" sz="900">
+                <a:solidFill>
+                  <a:srgbClr val="B4B4B4"/>
+                </a:solidFill>
+              </a:rPr>
+              <a:t>(c) titi_23 - mediateur-numerique.github.io - Reproduction interdite sans autorisation</a:t>
+            </a:r>
+          </a:p>
+        </p:txBody>
+      </p:sp>
     </p:spTree>
   </p:cSld>
   <p:clrMapOvr>
@@ -27128,6 +27928,46 @@
           </a:p>
         </p:txBody>
       </p:sp>
+      <p:sp>
+        <p:nvSpPr>
+          <p:cNvPr id="42" name="ZoneTexte 41">
+            <a:extLst>
+              <a:ext uri="{FF2B5EF4-FFF2-40B4-BE49-F238E27FC236}">
+                <a16:creationId xmlns:a16="http://schemas.microsoft.com/office/drawing/2014/main" id="{2BFA7FD0-6813-8BE0-BF37-0D2F392F4405}"/>
+              </a:ext>
+            </a:extLst>
+          </p:cNvPr>
+          <p:cNvSpPr txBox="1"/>
+          <p:nvPr/>
+        </p:nvSpPr>
+        <p:spPr>
+          <a:xfrm>
+            <a:off x="0" y="4864100"/>
+            <a:ext cx="9144000" cy="230832"/>
+          </a:xfrm>
+          <a:prstGeom prst="rect">
+            <a:avLst/>
+          </a:prstGeom>
+          <a:noFill/>
+        </p:spPr>
+        <p:txBody>
+          <a:bodyPr vert="horz" rtlCol="0">
+            <a:spAutoFit/>
+          </a:bodyPr>
+          <a:lstStyle/>
+          <a:p>
+            <a:pPr algn="ctr"/>
+            <a:r>
+              <a:rPr lang="fr-FR" sz="900">
+                <a:solidFill>
+                  <a:srgbClr val="B4B4B4"/>
+                </a:solidFill>
+              </a:rPr>
+              <a:t>(c) titi_23 - mediateur-numerique.github.io - Reproduction interdite sans autorisation</a:t>
+            </a:r>
+          </a:p>
+        </p:txBody>
+      </p:sp>
     </p:spTree>
   </p:cSld>
   <p:clrMapOvr>
@@ -28005,6 +28845,46 @@
           </a:p>
         </p:txBody>
       </p:sp>
+      <p:sp>
+        <p:nvSpPr>
+          <p:cNvPr id="27" name="ZoneTexte 26">
+            <a:extLst>
+              <a:ext uri="{FF2B5EF4-FFF2-40B4-BE49-F238E27FC236}">
+                <a16:creationId xmlns:a16="http://schemas.microsoft.com/office/drawing/2014/main" id="{756CEF98-57F2-2256-2840-AB803421D285}"/>
+              </a:ext>
+            </a:extLst>
+          </p:cNvPr>
+          <p:cNvSpPr txBox="1"/>
+          <p:nvPr/>
+        </p:nvSpPr>
+        <p:spPr>
+          <a:xfrm>
+            <a:off x="0" y="4864100"/>
+            <a:ext cx="9144000" cy="230832"/>
+          </a:xfrm>
+          <a:prstGeom prst="rect">
+            <a:avLst/>
+          </a:prstGeom>
+          <a:noFill/>
+        </p:spPr>
+        <p:txBody>
+          <a:bodyPr vert="horz" rtlCol="0">
+            <a:spAutoFit/>
+          </a:bodyPr>
+          <a:lstStyle/>
+          <a:p>
+            <a:pPr algn="ctr"/>
+            <a:r>
+              <a:rPr lang="fr-FR" sz="900">
+                <a:solidFill>
+                  <a:srgbClr val="B4B4B4"/>
+                </a:solidFill>
+              </a:rPr>
+              <a:t>(c) titi_23 - mediateur-numerique.github.io - Reproduction interdite sans autorisation</a:t>
+            </a:r>
+          </a:p>
+        </p:txBody>
+      </p:sp>
     </p:spTree>
   </p:cSld>
   <p:clrMapOvr>
@@ -29614,6 +30494,46 @@
           </a:p>
         </p:txBody>
       </p:sp>
+      <p:sp>
+        <p:nvSpPr>
+          <p:cNvPr id="39" name="ZoneTexte 38">
+            <a:extLst>
+              <a:ext uri="{FF2B5EF4-FFF2-40B4-BE49-F238E27FC236}">
+                <a16:creationId xmlns:a16="http://schemas.microsoft.com/office/drawing/2014/main" id="{3A1B8F19-7EA6-F21D-F9E1-6CBE740D56FA}"/>
+              </a:ext>
+            </a:extLst>
+          </p:cNvPr>
+          <p:cNvSpPr txBox="1"/>
+          <p:nvPr/>
+        </p:nvSpPr>
+        <p:spPr>
+          <a:xfrm>
+            <a:off x="0" y="4864100"/>
+            <a:ext cx="9144000" cy="230832"/>
+          </a:xfrm>
+          <a:prstGeom prst="rect">
+            <a:avLst/>
+          </a:prstGeom>
+          <a:noFill/>
+        </p:spPr>
+        <p:txBody>
+          <a:bodyPr vert="horz" rtlCol="0">
+            <a:spAutoFit/>
+          </a:bodyPr>
+          <a:lstStyle/>
+          <a:p>
+            <a:pPr algn="ctr"/>
+            <a:r>
+              <a:rPr lang="fr-FR" sz="900">
+                <a:solidFill>
+                  <a:srgbClr val="B4B4B4"/>
+                </a:solidFill>
+              </a:rPr>
+              <a:t>(c) titi_23 - mediateur-numerique.github.io - Reproduction interdite sans autorisation</a:t>
+            </a:r>
+          </a:p>
+        </p:txBody>
+      </p:sp>
     </p:spTree>
   </p:cSld>
   <p:clrMapOvr>
@@ -31192,6 +32112,46 @@
           </a:p>
         </p:txBody>
       </p:sp>
+      <p:sp>
+        <p:nvSpPr>
+          <p:cNvPr id="45" name="ZoneTexte 44">
+            <a:extLst>
+              <a:ext uri="{FF2B5EF4-FFF2-40B4-BE49-F238E27FC236}">
+                <a16:creationId xmlns:a16="http://schemas.microsoft.com/office/drawing/2014/main" id="{D262B2B5-D80C-BBED-D92B-7FB05FE407A6}"/>
+              </a:ext>
+            </a:extLst>
+          </p:cNvPr>
+          <p:cNvSpPr txBox="1"/>
+          <p:nvPr/>
+        </p:nvSpPr>
+        <p:spPr>
+          <a:xfrm>
+            <a:off x="0" y="4864100"/>
+            <a:ext cx="9144000" cy="230832"/>
+          </a:xfrm>
+          <a:prstGeom prst="rect">
+            <a:avLst/>
+          </a:prstGeom>
+          <a:noFill/>
+        </p:spPr>
+        <p:txBody>
+          <a:bodyPr vert="horz" rtlCol="0">
+            <a:spAutoFit/>
+          </a:bodyPr>
+          <a:lstStyle/>
+          <a:p>
+            <a:pPr algn="ctr"/>
+            <a:r>
+              <a:rPr lang="fr-FR" sz="900">
+                <a:solidFill>
+                  <a:srgbClr val="B4B4B4"/>
+                </a:solidFill>
+              </a:rPr>
+              <a:t>(c) titi_23 - mediateur-numerique.github.io - Reproduction interdite sans autorisation</a:t>
+            </a:r>
+          </a:p>
+        </p:txBody>
+      </p:sp>
     </p:spTree>
   </p:cSld>
   <p:clrMapOvr>
@@ -34093,6 +35053,46 @@
           </a:p>
         </p:txBody>
       </p:sp>
+      <p:sp>
+        <p:nvSpPr>
+          <p:cNvPr id="93" name="ZoneTexte 92">
+            <a:extLst>
+              <a:ext uri="{FF2B5EF4-FFF2-40B4-BE49-F238E27FC236}">
+                <a16:creationId xmlns:a16="http://schemas.microsoft.com/office/drawing/2014/main" id="{91E58413-3E00-3A13-9129-DEB163337189}"/>
+              </a:ext>
+            </a:extLst>
+          </p:cNvPr>
+          <p:cNvSpPr txBox="1"/>
+          <p:nvPr/>
+        </p:nvSpPr>
+        <p:spPr>
+          <a:xfrm>
+            <a:off x="0" y="4864100"/>
+            <a:ext cx="9144000" cy="230832"/>
+          </a:xfrm>
+          <a:prstGeom prst="rect">
+            <a:avLst/>
+          </a:prstGeom>
+          <a:noFill/>
+        </p:spPr>
+        <p:txBody>
+          <a:bodyPr vert="horz" rtlCol="0">
+            <a:spAutoFit/>
+          </a:bodyPr>
+          <a:lstStyle/>
+          <a:p>
+            <a:pPr algn="ctr"/>
+            <a:r>
+              <a:rPr lang="fr-FR" sz="900">
+                <a:solidFill>
+                  <a:srgbClr val="B4B4B4"/>
+                </a:solidFill>
+              </a:rPr>
+              <a:t>(c) titi_23 - mediateur-numerique.github.io - Reproduction interdite sans autorisation</a:t>
+            </a:r>
+          </a:p>
+        </p:txBody>
+      </p:sp>
     </p:spTree>
   </p:cSld>
   <p:clrMapOvr>
@@ -35157,6 +36157,46 @@
               <a:t>Ahmed cherche un emploi de livreur à Marseille. Il va sur indeed.fr → tape « livreur Marseille » → trouve 23 offres → clique sur une offre McDonald's → lit la description → clique « Postuler maintenant » → joint son CV PDF → envoie. 2 jours plus tard, il reçoit un email pour un entretien.</a:t>
             </a:r>
             <a:endParaRPr lang="en-US" sz="950" dirty="0"/>
+          </a:p>
+        </p:txBody>
+      </p:sp>
+      <p:sp>
+        <p:nvSpPr>
+          <p:cNvPr id="32" name="ZoneTexte 31">
+            <a:extLst>
+              <a:ext uri="{FF2B5EF4-FFF2-40B4-BE49-F238E27FC236}">
+                <a16:creationId xmlns:a16="http://schemas.microsoft.com/office/drawing/2014/main" id="{44009E17-406A-FC1D-629F-6095A2DA754B}"/>
+              </a:ext>
+            </a:extLst>
+          </p:cNvPr>
+          <p:cNvSpPr txBox="1"/>
+          <p:nvPr/>
+        </p:nvSpPr>
+        <p:spPr>
+          <a:xfrm>
+            <a:off x="0" y="4864100"/>
+            <a:ext cx="9144000" cy="230832"/>
+          </a:xfrm>
+          <a:prstGeom prst="rect">
+            <a:avLst/>
+          </a:prstGeom>
+          <a:noFill/>
+        </p:spPr>
+        <p:txBody>
+          <a:bodyPr vert="horz" rtlCol="0">
+            <a:spAutoFit/>
+          </a:bodyPr>
+          <a:lstStyle/>
+          <a:p>
+            <a:pPr algn="ctr"/>
+            <a:r>
+              <a:rPr lang="fr-FR" sz="900">
+                <a:solidFill>
+                  <a:srgbClr val="B4B4B4"/>
+                </a:solidFill>
+              </a:rPr>
+              <a:t>(c) titi_23 - mediateur-numerique.github.io - Reproduction interdite sans autorisation</a:t>
+            </a:r>
           </a:p>
         </p:txBody>
       </p:sp>
